--- a/OSu/Chap13.pptx
+++ b/OSu/Chap13.pptx
@@ -17051,7 +17051,23 @@
                   <a:srgbClr val="0033CC"/>
                 </a:solidFill>
               </a:rPr>
-              <a:t>()/2, EXCLUSIVE);</a:t>
+              <a:t>()/2, </a:t>
+            </a:r>
+            <a:r>
+              <a:rPr lang="en-US" altLang="en-US" sz="1600" b="1" dirty="0">
+                <a:solidFill>
+                  <a:srgbClr val="0033CC"/>
+                </a:solidFill>
+              </a:rPr>
+              <a:t>EXCLUSIVE</a:t>
+            </a:r>
+            <a:r>
+              <a:rPr lang="en-US" altLang="en-US" sz="1600" dirty="0">
+                <a:solidFill>
+                  <a:srgbClr val="0033CC"/>
+                </a:solidFill>
+              </a:rPr>
+              <a:t>);</a:t>
             </a:r>
           </a:p>
           <a:p>
@@ -17215,7 +17231,7 @@
         <p:spPr>
           <a:xfrm>
             <a:off x="883295" y="1250950"/>
-            <a:ext cx="7158979" cy="5267325"/>
+            <a:ext cx="7803505" cy="5267325"/>
           </a:xfrm>
         </p:spPr>
         <p:txBody>
@@ -17320,7 +17336,23 @@
                   <a:srgbClr val="0033CC"/>
                 </a:solidFill>
               </a:rPr>
-              <a:t>(), 				SHARED);</a:t>
+              <a:t>(), </a:t>
+            </a:r>
+            <a:r>
+              <a:rPr lang="en-US" altLang="en-US" sz="1600" b="1" dirty="0">
+                <a:solidFill>
+                  <a:srgbClr val="0033CC"/>
+                </a:solidFill>
+              </a:rPr>
+              <a:t>SHARED</a:t>
+            </a:r>
+            <a:r>
+              <a:rPr lang="en-US" altLang="en-US" sz="1600" dirty="0">
+                <a:solidFill>
+                  <a:srgbClr val="0033CC"/>
+                </a:solidFill>
+              </a:rPr>
+              <a:t>);</a:t>
             </a:r>
           </a:p>
           <a:p>
@@ -28780,7 +28812,7 @@
             <a:pPr eaLnBrk="1" hangingPunct="1"/>
             <a:r>
               <a:rPr lang="en-US" altLang="en-US" dirty="0"/>
-              <a:t>File info Window on Mac OS X</a:t>
+              <a:t>File Info Window on Mac OS X</a:t>
             </a:r>
           </a:p>
         </p:txBody>
